--- a/public/works/deck/deck-memphis-01.pptx
+++ b/public/works/deck/deck-memphis-01.pptx
@@ -2258,60 +2258,49 @@
           <a:chExt cx="0" cy="0"/>
         </a:xfrm>
       </p:grpSpPr>
-      <p:sp>
-        <p:nvSpPr>
-          <p:cNvPr id="2" name="title-1"/>
-          <p:cNvSpPr txBox="1"/>
-          <p:nvPr/>
-        </p:nvSpPr>
-        <p:spPr>
-          <a:xfrm>
-            <a:off x="685800" y="1500000"/>
-            <a:ext cx="10820400" cy="900000"/>
-          </a:xfrm>
-          <a:prstGeom prst="rect">
-            <a:avLst/>
-          </a:prstGeom>
-          <a:noFill/>
-        </p:spPr>
-        <p:txBody>
-          <a:bodyPr wrap="square" lIns="91440" rIns="91440" anchor="t">
-            <a:normAutofit/>
-          </a:bodyPr>
-          <a:lstStyle/>
-          <a:p>
-            <a:pPr algn="ctr" marL="0" indent="0">
-              <a:buNone/>
-            </a:pPr>
-            <a:r>
-              <a:rPr lang="zh-CN" altLang="en-US" sz="4400" b="1" dirty="0">
-                <a:solidFill>
-                  <a:srgbClr val="1C0A0F"/>
-                </a:solidFill>
-                <a:latin typeface="Smiley Sans"/>
-                <a:ea typeface="Smiley Sans"/>
-              </a:rPr>
-              <a:t>不做盲盒</a:t>
-            </a:r>
-          </a:p>
-        </p:txBody>
-      </p:sp>
-      <p:sp>
-        <p:nvSpPr>
-          <p:cNvPr id="3" name="accent-bar"/>
+      <p:pic>
+        <p:nvPicPr>
+          <p:cNvPr id="2" name="p2" descr="撞色几何风格的门店与发布现场，人群与展台"/>
+          <p:cNvPicPr>
+            <a:picLocks noChangeAspect="1"/>
+          </p:cNvPicPr>
+          <p:nvPr/>
+        </p:nvPicPr>
+        <p:blipFill>
+          <a:blip r:embed="rId2"/>
+          <a:srcRect t="10476" b="10476"/>
+          <a:stretch>
+            <a:fillRect/>
+          </a:stretch>
+        </p:blipFill>
+        <p:spPr>
+          <a:xfrm>
+            <a:off x="0" y="0"/>
+            <a:ext cx="12192000" cy="6858000"/>
+          </a:xfrm>
+          <a:prstGeom prst="rect">
+            <a:avLst/>
+          </a:prstGeom>
+        </p:spPr>
+      </p:pic>
+      <p:sp>
+        <p:nvSpPr>
+          <p:cNvPr id="3" name="scrim-band-1"/>
           <p:cNvSpPr/>
           <p:nvPr/>
         </p:nvSpPr>
         <p:spPr>
           <a:xfrm>
-            <a:off x="685800" y="2400000"/>
-            <a:ext cx="10820400" cy="90000"/>
+            <a:off x="0" y="5200000"/>
+            <a:ext cx="4064000" cy="1000000"/>
           </a:xfrm>
           <a:prstGeom prst="rect">
             <a:avLst/>
           </a:prstGeom>
           <a:solidFill>
-            <a:srgbClr val="E11D48"/>
+            <a:srgbClr val="28324E">
+              <a:alpha val="88000"/>
+            </a:srgbClr>
           </a:solidFill>
           <a:ln>
             <a:noFill/>
@@ -2327,14 +2316,114 @@
       </p:sp>
       <p:sp>
         <p:nvSpPr>
-          <p:cNvPr id="4" name="subtitle"/>
+          <p:cNvPr id="4" name="scrim-band-2"/>
+          <p:cNvSpPr/>
+          <p:nvPr/>
+        </p:nvSpPr>
+        <p:spPr>
+          <a:xfrm>
+            <a:off x="4064000" y="5200000"/>
+            <a:ext cx="4064000" cy="1000000"/>
+          </a:xfrm>
+          <a:prstGeom prst="rect">
+            <a:avLst/>
+          </a:prstGeom>
+          <a:solidFill>
+            <a:srgbClr val="28324E">
+              <a:alpha val="76000"/>
+            </a:srgbClr>
+          </a:solidFill>
+          <a:ln>
+            <a:noFill/>
+          </a:ln>
+        </p:spPr>
+        <p:txBody>
+          <a:bodyPr/>
+          <a:lstStyle/>
+          <a:p>
+            <a:endParaRPr lang="zh-CN"/>
+          </a:p>
+        </p:txBody>
+      </p:sp>
+      <p:sp>
+        <p:nvSpPr>
+          <p:cNvPr id="5" name="scrim-band-3"/>
+          <p:cNvSpPr/>
+          <p:nvPr/>
+        </p:nvSpPr>
+        <p:spPr>
+          <a:xfrm>
+            <a:off x="8128000" y="5200000"/>
+            <a:ext cx="4064000" cy="1000000"/>
+          </a:xfrm>
+          <a:prstGeom prst="rect">
+            <a:avLst/>
+          </a:prstGeom>
+          <a:solidFill>
+            <a:srgbClr val="28324E">
+              <a:alpha val="64000"/>
+            </a:srgbClr>
+          </a:solidFill>
+          <a:ln>
+            <a:noFill/>
+          </a:ln>
+        </p:spPr>
+        <p:txBody>
+          <a:bodyPr/>
+          <a:lstStyle/>
+          <a:p>
+            <a:endParaRPr lang="zh-CN"/>
+          </a:p>
+        </p:txBody>
+      </p:sp>
+      <p:sp>
+        <p:nvSpPr>
+          <p:cNvPr id="6" name="title"/>
           <p:cNvSpPr txBox="1"/>
           <p:nvPr/>
         </p:nvSpPr>
         <p:spPr>
           <a:xfrm>
-            <a:off x="685800" y="2700000"/>
-            <a:ext cx="10820400" cy="600000"/>
+            <a:off x="685800" y="5200000"/>
+            <a:ext cx="10820400" cy="1000000"/>
+          </a:xfrm>
+          <a:prstGeom prst="rect">
+            <a:avLst/>
+          </a:prstGeom>
+          <a:noFill/>
+        </p:spPr>
+        <p:txBody>
+          <a:bodyPr wrap="square" lIns="91440" rIns="91440" anchor="ctr">
+            <a:normAutofit/>
+          </a:bodyPr>
+          <a:lstStyle/>
+          <a:p>
+            <a:pPr algn="l" marL="0" indent="0">
+              <a:buNone/>
+            </a:pPr>
+            <a:r>
+              <a:rPr lang="zh-CN" altLang="en-US" sz="4000" b="1" dirty="0">
+                <a:solidFill>
+                  <a:srgbClr val="FFF1F2"/>
+                </a:solidFill>
+                <a:latin typeface="Smiley Sans"/>
+                <a:ea typeface="Smiley Sans"/>
+              </a:rPr>
+              <a:t>不做盲盒</a:t>
+            </a:r>
+          </a:p>
+        </p:txBody>
+      </p:sp>
+      <p:sp>
+        <p:nvSpPr>
+          <p:cNvPr id="7" name="footer"/>
+          <p:cNvSpPr txBox="1"/>
+          <p:nvPr/>
+        </p:nvSpPr>
+        <p:spPr>
+          <a:xfrm>
+            <a:off x="685800" y="6400800"/>
+            <a:ext cx="5410200" cy="300000"/>
           </a:xfrm>
           <a:prstGeom prst="rect">
             <a:avLst/>
@@ -2347,44 +2436,6 @@
           </a:bodyPr>
           <a:lstStyle/>
           <a:p>
-            <a:pPr algn="ctr" marL="0" indent="0">
-              <a:buNone/>
-            </a:pPr>
-            <a:r>
-              <a:rPr lang="zh-CN" altLang="en-US" sz="1800" b="0" dirty="0">
-                <a:solidFill>
-                  <a:srgbClr val="6B5158"/>
-                </a:solidFill>
-                <a:latin typeface="Smiley Sans"/>
-                <a:ea typeface="Smiley Sans"/>
-              </a:rPr>
-              <a:t>校园文创「壳与芯」2026 秋季首发 · 9 月 12 日 · 三件东西，一个定价承诺</a:t>
-            </a:r>
-          </a:p>
-        </p:txBody>
-      </p:sp>
-      <p:sp>
-        <p:nvSpPr>
-          <p:cNvPr id="5" name="footer"/>
-          <p:cNvSpPr txBox="1"/>
-          <p:nvPr/>
-        </p:nvSpPr>
-        <p:spPr>
-          <a:xfrm>
-            <a:off x="685800" y="6400800"/>
-            <a:ext cx="5410200" cy="300000"/>
-          </a:xfrm>
-          <a:prstGeom prst="rect">
-            <a:avLst/>
-          </a:prstGeom>
-          <a:noFill/>
-        </p:spPr>
-        <p:txBody>
-          <a:bodyPr wrap="square" lIns="91440" rIns="91440" anchor="t">
-            <a:normAutofit/>
-          </a:bodyPr>
-          <a:lstStyle/>
-          <a:p>
             <a:pPr algn="l" marL="0" indent="0">
               <a:buNone/>
             </a:pPr>
@@ -2403,7 +2454,7 @@
       </p:sp>
       <p:sp>
         <p:nvSpPr>
-          <p:cNvPr id="6" name="page-number"/>
+          <p:cNvPr id="8" name="page-number"/>
           <p:cNvSpPr txBox="1"/>
           <p:nvPr/>
         </p:nvSpPr>
